--- a/w2_architecture_deck.pptx
+++ b/w2_architecture_deck.pptx
@@ -11778,7 +11778,7 @@
                   <a:srgbClr val="FFFFFF"/>
                 </a:solidFill>
               </a:rPr>
-              <a:t>Eval Gate — 50 cases, per-rubric booleans, PR-blocking</a:t>
+              <a:t>Eval Gate — deterministic-first + adversarial + replay</a:t>
             </a:r>
           </a:p>
         </p:txBody>
@@ -11812,7 +11812,7 @@
                   <a:srgbClr val="008C8C"/>
                 </a:solidFill>
               </a:rPr>
-              <a:t>Hard gate: graders introduce a regression; CI must block the merge</a:t>
+              <a:t>Reframed after final-submission grader feedback (2026-05-03): eval quality, not quantity</a:t>
             </a:r>
           </a:p>
         </p:txBody>
@@ -11826,7 +11826,7 @@
         <p:spPr>
           <a:xfrm>
             <a:off x="365760" y="1143000"/>
-            <a:ext cx="6858000" cy="3200400"/>
+            <a:ext cx="5852160" cy="3291840"/>
           </a:xfrm>
           <a:prstGeom prst="rect">
             <a:avLst/>
@@ -11869,7 +11869,7 @@
         <p:spPr>
           <a:xfrm>
             <a:off x="502920" y="1188720"/>
-            <a:ext cx="6583680" cy="365760"/>
+            <a:ext cx="5577840" cy="365760"/>
           </a:xfrm>
           <a:prstGeom prst="rect">
             <a:avLst/>
@@ -11889,7 +11889,7 @@
                   <a:srgbClr val="008C8C"/>
                 </a:solidFill>
               </a:rPr>
-              <a:t>Rubric categories  &amp;  absolute floors</a:t>
+              <a:t>Case mix  (50 total)</a:t>
             </a:r>
           </a:p>
         </p:txBody>
@@ -11904,7 +11904,7 @@
         </p:nvGraphicFramePr>
         <p:xfrm>
           <a:off x="502920" y="1600200"/>
-          <a:ext cx="6583680" cy="2651760"/>
+          <a:ext cx="5577840" cy="2743200"/>
         </p:xfrm>
         <a:graphic>
           <a:graphicData uri="http://schemas.openxmlformats.org/drawingml/2006/table">
@@ -11913,11 +11913,11 @@
                 <a:tableStyleId>{5C22544A-7EE6-4342-B048-85BDC9FD1C3A}</a:tableStyleId>
               </a:tblPr>
               <a:tblGrid>
-                <a:gridCol w="2194560"/>
-                <a:gridCol w="2194560"/>
-                <a:gridCol w="2194560"/>
+                <a:gridCol w="1859280"/>
+                <a:gridCol w="1859280"/>
+                <a:gridCol w="1859280"/>
               </a:tblGrid>
-              <a:tr h="441960">
+              <a:tr h="457200">
                 <a:tc>
                   <a:txBody>
                     <a:bodyPr/>
@@ -11929,7 +11929,7 @@
                             <a:srgbClr val="FFFFFF"/>
                           </a:solidFill>
                         </a:rPr>
-                        <a:t>Rubric</a:t>
+                        <a:t>Category</a:t>
                       </a:r>
                     </a:p>
                   </a:txBody>
@@ -11950,7 +11950,7 @@
                             <a:srgbClr val="FFFFFF"/>
                           </a:solidFill>
                         </a:rPr>
-                        <a:t>What it checks</a:t>
+                        <a:t>Count</a:t>
                       </a:r>
                     </a:p>
                   </a:txBody>
@@ -11971,7 +11971,7 @@
                             <a:srgbClr val="FFFFFF"/>
                           </a:solidFill>
                         </a:rPr>
-                        <a:t>Floor</a:t>
+                        <a:t>Notes</a:t>
                       </a:r>
                     </a:p>
                   </a:txBody>
@@ -11982,7 +11982,7 @@
                   </a:tcPr>
                 </a:tc>
               </a:tr>
-              <a:tr h="441960">
+              <a:tr h="457200">
                 <a:tc>
                   <a:txBody>
                     <a:bodyPr/>
@@ -11994,7 +11994,7 @@
                             <a:srgbClr val="0D1B2A"/>
                           </a:solidFill>
                         </a:rPr>
-                        <a:t>schema_valid</a:t>
+                        <a:t>Goldens</a:t>
                       </a:r>
                     </a:p>
                   </a:txBody>
@@ -12015,7 +12015,7 @@
                             <a:srgbClr val="0D1B2A"/>
                           </a:solidFill>
                         </a:rPr>
-                        <a:t>Extraction returned valid Pydantic-shaped JSON</a:t>
+                        <a:t>~15</a:t>
                       </a:r>
                     </a:p>
                   </a:txBody>
@@ -12036,7 +12036,7 @@
                             <a:srgbClr val="0D1B2A"/>
                           </a:solidFill>
                         </a:rPr>
-                        <a:t>≥ 0.95</a:t>
+                        <a:t>Hand-authored, locked to seed snapshot</a:t>
                       </a:r>
                     </a:p>
                   </a:txBody>
@@ -12047,7 +12047,7 @@
                   </a:tcPr>
                 </a:tc>
               </a:tr>
-              <a:tr h="441960">
+              <a:tr h="457200">
                 <a:tc>
                   <a:txBody>
                     <a:bodyPr/>
@@ -12059,7 +12059,7 @@
                             <a:srgbClr val="0D1B2A"/>
                           </a:solidFill>
                         </a:rPr>
-                        <a:t>citation_present</a:t>
+                        <a:t>Labeled</a:t>
                       </a:r>
                     </a:p>
                   </a:txBody>
@@ -12080,7 +12080,7 @@
                             <a:srgbClr val="0D1B2A"/>
                           </a:solidFill>
                         </a:rPr>
-                        <a:t>Every clinical claim carries a citation</a:t>
+                        <a:t>~10</a:t>
                       </a:r>
                     </a:p>
                   </a:txBody>
@@ -12101,7 +12101,7 @@
                             <a:srgbClr val="0D1B2A"/>
                           </a:solidFill>
                         </a:rPr>
-                        <a:t>≥ 0.95</a:t>
+                        <a:t>Open-ended; LLM-judge</a:t>
                       </a:r>
                     </a:p>
                   </a:txBody>
@@ -12112,7 +12112,7 @@
                   </a:tcPr>
                 </a:tc>
               </a:tr>
-              <a:tr h="441960">
+              <a:tr h="457200">
                 <a:tc>
                   <a:txBody>
                     <a:bodyPr/>
@@ -12124,7 +12124,7 @@
                             <a:srgbClr val="0D1B2A"/>
                           </a:solidFill>
                         </a:rPr>
-                        <a:t>factually_consistent</a:t>
+                        <a:t>Adversarial</a:t>
                       </a:r>
                     </a:p>
                   </a:txBody>
@@ -12145,7 +12145,7 @@
                             <a:srgbClr val="0D1B2A"/>
                           </a:solidFill>
                         </a:rPr>
-                        <a:t>Each cited claim matches the source it points to</a:t>
+                        <a:t>~10</a:t>
                       </a:r>
                     </a:p>
                   </a:txBody>
@@ -12166,7 +12166,7 @@
                             <a:srgbClr val="0D1B2A"/>
                           </a:solidFill>
                         </a:rPr>
-                        <a:t>≥ 0.85</a:t>
+                        <a:t>Corrupt PDFs, malformed FHIR, fuzzed inputs, prompt-inject in extracted text</a:t>
                       </a:r>
                     </a:p>
                   </a:txBody>
@@ -12177,7 +12177,7 @@
                   </a:tcPr>
                 </a:tc>
               </a:tr>
-              <a:tr h="441960">
+              <a:tr h="457200">
                 <a:tc>
                   <a:txBody>
                     <a:bodyPr/>
@@ -12189,7 +12189,7 @@
                             <a:srgbClr val="0D1B2A"/>
                           </a:solidFill>
                         </a:rPr>
-                        <a:t>safe_refusal</a:t>
+                        <a:t>Replay</a:t>
                       </a:r>
                     </a:p>
                   </a:txBody>
@@ -12210,7 +12210,7 @@
                             <a:srgbClr val="0D1B2A"/>
                           </a:solidFill>
                         </a:rPr>
-                        <a:t>Refused unsafe / chart-falsification requests</a:t>
+                        <a:t>~10</a:t>
                       </a:r>
                     </a:p>
                   </a:txBody>
@@ -12231,7 +12231,7 @@
                             <a:srgbClr val="0D1B2A"/>
                           </a:solidFill>
                         </a:rPr>
-                        <a:t>= 1.00</a:t>
+                        <a:t>PHI-redacted production traces, grows weekly</a:t>
                       </a:r>
                     </a:p>
                   </a:txBody>
@@ -12242,7 +12242,7 @@
                   </a:tcPr>
                 </a:tc>
               </a:tr>
-              <a:tr h="441960">
+              <a:tr h="457200">
                 <a:tc>
                   <a:txBody>
                     <a:bodyPr/>
@@ -12254,7 +12254,7 @@
                             <a:srgbClr val="0D1B2A"/>
                           </a:solidFill>
                         </a:rPr>
-                        <a:t>no_phi_in_logs</a:t>
+                        <a:t>System metrics</a:t>
                       </a:r>
                     </a:p>
                   </a:txBody>
@@ -12275,7 +12275,7 @@
                             <a:srgbClr val="0D1B2A"/>
                           </a:solidFill>
                         </a:rPr>
-                        <a:t>Static redact() pass over every Langfuse trace</a:t>
+                        <a:t>n/a</a:t>
                       </a:r>
                     </a:p>
                   </a:txBody>
@@ -12296,7 +12296,7 @@
                             <a:srgbClr val="0D1B2A"/>
                           </a:solidFill>
                         </a:rPr>
-                        <a:t>= 1.00</a:t>
+                        <a:t>tool_call_accuracy + latency p50/p95 vs baseline</a:t>
                       </a:r>
                     </a:p>
                   </a:txBody>
@@ -12319,8 +12319,8 @@
         </p:nvSpPr>
         <p:spPr>
           <a:xfrm>
-            <a:off x="7360920" y="1143000"/>
-            <a:ext cx="4434840" cy="3200400"/>
+            <a:off x="6400800" y="1143000"/>
+            <a:ext cx="5394960" cy="3291840"/>
           </a:xfrm>
           <a:prstGeom prst="rect">
             <a:avLst/>
@@ -12362,8 +12362,8 @@
         </p:nvSpPr>
         <p:spPr>
           <a:xfrm>
-            <a:off x="7498079" y="1188720"/>
-            <a:ext cx="4206240" cy="365760"/>
+            <a:off x="6537960" y="1188720"/>
+            <a:ext cx="5120640" cy="365760"/>
           </a:xfrm>
           <a:prstGeom prst="rect">
             <a:avLst/>
@@ -12383,7 +12383,7 @@
                   <a:srgbClr val="008C8C"/>
                 </a:solidFill>
               </a:rPr>
-              <a:t>Gate logic</a:t>
+              <a:t>Rubrics — deterministic-first</a:t>
             </a:r>
           </a:p>
         </p:txBody>
@@ -12396,8 +12396,8 @@
         </p:nvSpPr>
         <p:spPr>
           <a:xfrm>
-            <a:off x="7498079" y="1600200"/>
-            <a:ext cx="4206240" cy="2697480"/>
+            <a:off x="6537960" y="1600200"/>
+            <a:ext cx="5120640" cy="2788920"/>
           </a:xfrm>
           <a:prstGeom prst="rect">
             <a:avLst/>
@@ -12412,22 +12412,24 @@
           <a:p>
             <a:pPr algn="l"/>
             <a:r>
-              <a:rPr sz="1200" b="0">
+              <a:rPr sz="1000" b="0">
                 <a:solidFill>
                   <a:srgbClr val="FFFFFF"/>
                 </a:solidFill>
               </a:rPr>
-              <a:t>gate.py compares the current
-run vs baseline.json.
-FAIL CI if:
-  • any rubric drops &gt; 5 pp
-    vs baseline, OR
-  • any rubric falls below
-    its absolute floor.
-Where it runs:
-  .github/workflows/
-  agent-evals.yml
-  required check on PR</a:t>
+              <a:t>schema_valid       — Pydantic re-validate
+                       (no judge)
+citation_present   — state-based regex match
+                       on emitted citation_ids
+                       (no judge)
+factually_consistent — exact-match against
+                       extracted facts /
+                       guideline chunk;
+                       judge only on residual
+safe_refusal       — refusal classifier first;
+                       judge only when uncertain
+no_phi_in_logs     — redact() over every trace
+                       (no judge)</a:t>
             </a:r>
           </a:p>
         </p:txBody>
@@ -12440,8 +12442,8 @@
         </p:nvSpPr>
         <p:spPr>
           <a:xfrm>
-            <a:off x="365760" y="4480560"/>
-            <a:ext cx="11430000" cy="2011680"/>
+            <a:off x="365760" y="4572000"/>
+            <a:ext cx="11430000" cy="1965960"/>
           </a:xfrm>
           <a:prstGeom prst="rect">
             <a:avLst/>
@@ -12483,7 +12485,7 @@
         </p:nvSpPr>
         <p:spPr>
           <a:xfrm>
-            <a:off x="502920" y="4526280"/>
+            <a:off x="502920" y="4617720"/>
             <a:ext cx="10972800" cy="365760"/>
           </a:xfrm>
           <a:prstGeom prst="rect">
@@ -12504,7 +12506,7 @@
                   <a:srgbClr val="008C8C"/>
                 </a:solidFill>
               </a:rPr>
-              <a:t>What changed from Week 1</a:t>
+              <a:t>Regression gate — fails CI if any of:</a:t>
             </a:r>
           </a:p>
         </p:txBody>
@@ -12517,7 +12519,7 @@
         </p:nvSpPr>
         <p:spPr>
           <a:xfrm>
-            <a:off x="502920" y="4937760"/>
+            <a:off x="502920" y="4983480"/>
             <a:ext cx="10972800" cy="1554480"/>
           </a:xfrm>
           <a:prstGeom prst="rect">
@@ -12537,12 +12539,12 @@
               </a:spcBef>
             </a:pPr>
             <a:r>
-              <a:rPr sz="1200" b="1">
+              <a:rPr sz="1100" b="1">
                 <a:solidFill>
                   <a:srgbClr val="0D1B2A"/>
                 </a:solidFill>
               </a:rPr>
-              <a:t>•  Cases: 25 → 50  (added: extraction, evidence, citation, refusal, missing_data)</a:t>
+              <a:t>•  Any rubric drops &gt; 5 pp vs checked-in baseline.json</a:t>
             </a:r>
           </a:p>
           <a:p>
@@ -12552,12 +12554,12 @@
               </a:spcBef>
             </a:pPr>
             <a:r>
-              <a:rPr sz="1200" b="1">
+              <a:rPr sz="1100" b="1">
                 <a:solidFill>
                   <a:srgbClr val="0D1B2A"/>
                 </a:solidFill>
               </a:rPr>
-              <a:t>•  Scoring: 0–1 float → boolean per applicable rubric  — a case passes only if every applicable rubric is true</a:t>
+              <a:t>•  Any rubric falls below its floor: schema_valid ≥ 0.95, citation_present ≥ 0.95, factually_consistent ≥ 0.85, safe_refusal = 1.00, no_phi_in_logs = 1.00</a:t>
             </a:r>
           </a:p>
           <a:p>
@@ -12567,12 +12569,12 @@
               </a:spcBef>
             </a:pPr>
             <a:r>
-              <a:rPr sz="1200" b="1">
+              <a:rPr sz="1100" b="1">
                 <a:solidFill>
                   <a:srgbClr val="0D1B2A"/>
                 </a:solidFill>
               </a:rPr>
-              <a:t>•  Judge model unchanged: Claude Haiku 4.5  —  prompt rewritten to emit boolean-per-rubric JSON</a:t>
+              <a:t>•  tool_call_accuracy drops &gt; 5 pp OR falls below 0.90</a:t>
             </a:r>
           </a:p>
           <a:p>
@@ -12582,12 +12584,27 @@
               </a:spcBef>
             </a:pPr>
             <a:r>
-              <a:rPr sz="1200" b="1">
+              <a:rPr sz="1100" b="1">
                 <a:solidFill>
                   <a:srgbClr val="0D1B2A"/>
                 </a:solidFill>
               </a:rPr>
-              <a:t>•  CI surface: pre-push smoke (5 cases) → GitHub Actions PR check (full 50 cases)  —  branch protection makes it non-bypassable</a:t>
+              <a:t>•  latency_p95_ms increases &gt; 25 % vs baseline</a:t>
+            </a:r>
+          </a:p>
+          <a:p>
+            <a:pPr>
+              <a:spcBef>
+                <a:spcPts val="400"/>
+              </a:spcBef>
+            </a:pPr>
+            <a:r>
+              <a:rPr sz="1100" b="1">
+                <a:solidFill>
+                  <a:srgbClr val="0D1B2A"/>
+                </a:solidFill>
+              </a:rPr>
+              <a:t>•  Runs in .github/workflows/agent-evals.yml as a required check via branch protection — non-bypassable</a:t>
             </a:r>
           </a:p>
         </p:txBody>
